--- a/kafka ui 비교 검토.pptx
+++ b/kafka ui 비교 검토.pptx
@@ -3012,8 +3012,8 @@
         </p:nvSpPr>
         <p:spPr>
           <a:xfrm>
-            <a:off x="3821906" y="885824"/>
-            <a:ext cx="735808" cy="702129"/>
+            <a:off x="3855156" y="885824"/>
+            <a:ext cx="702558" cy="702129"/>
           </a:xfrm>
           <a:prstGeom prst="rect">
             <a:avLst/>
@@ -3278,14 +3278,14 @@
       </p:sp>
       <p:sp>
         <p:nvSpPr>
-          <p:cNvPr id="9" name="직사각형 8"/>
+          <p:cNvPr id="10" name="직사각형 9"/>
           <p:cNvSpPr/>
           <p:nvPr/>
         </p:nvSpPr>
         <p:spPr>
           <a:xfrm>
-            <a:off x="214313" y="3061952"/>
-            <a:ext cx="1600200" cy="263104"/>
+            <a:off x="211922" y="3093157"/>
+            <a:ext cx="1612111" cy="1328824"/>
           </a:xfrm>
           <a:prstGeom prst="rect">
             <a:avLst/>
@@ -3324,14 +3324,14 @@
       </p:sp>
       <p:sp>
         <p:nvSpPr>
-          <p:cNvPr id="10" name="직사각형 9"/>
+          <p:cNvPr id="11" name="직사각형 10"/>
           <p:cNvSpPr/>
           <p:nvPr/>
         </p:nvSpPr>
         <p:spPr>
           <a:xfrm>
-            <a:off x="223833" y="3871581"/>
-            <a:ext cx="1600200" cy="550399"/>
+            <a:off x="211922" y="1895127"/>
+            <a:ext cx="1600200" cy="276574"/>
           </a:xfrm>
           <a:prstGeom prst="rect">
             <a:avLst/>
@@ -3370,14 +3370,14 @@
       </p:sp>
       <p:sp>
         <p:nvSpPr>
-          <p:cNvPr id="11" name="직사각형 10"/>
+          <p:cNvPr id="12" name="직사각형 11"/>
           <p:cNvSpPr/>
           <p:nvPr/>
         </p:nvSpPr>
         <p:spPr>
           <a:xfrm>
-            <a:off x="211922" y="1895127"/>
-            <a:ext cx="1600200" cy="276574"/>
+            <a:off x="214299" y="2718226"/>
+            <a:ext cx="1600200" cy="284533"/>
           </a:xfrm>
           <a:prstGeom prst="rect">
             <a:avLst/>
@@ -3416,14 +3416,14 @@
       </p:sp>
       <p:sp>
         <p:nvSpPr>
-          <p:cNvPr id="12" name="직사각형 11"/>
+          <p:cNvPr id="13" name="직사각형 12"/>
           <p:cNvSpPr/>
           <p:nvPr/>
         </p:nvSpPr>
         <p:spPr>
           <a:xfrm>
-            <a:off x="214299" y="2718226"/>
-            <a:ext cx="1600200" cy="284533"/>
+            <a:off x="5937956" y="885824"/>
+            <a:ext cx="1433688" cy="702129"/>
           </a:xfrm>
           <a:prstGeom prst="rect">
             <a:avLst/>

--- a/kafka ui 비교 검토.pptx
+++ b/kafka ui 비교 검토.pptx
@@ -4300,6 +4300,52 @@
           </a:prstGeom>
         </p:spPr>
       </p:pic>
+      <p:sp>
+        <p:nvSpPr>
+          <p:cNvPr id="5" name="TextBox 4"/>
+          <p:cNvSpPr txBox="1"/>
+          <p:nvPr/>
+        </p:nvSpPr>
+        <p:spPr>
+          <a:xfrm>
+            <a:off x="4351867" y="2686756"/>
+            <a:ext cx="2517422" cy="646331"/>
+          </a:xfrm>
+          <a:prstGeom prst="rect">
+            <a:avLst/>
+          </a:prstGeom>
+          <a:noFill/>
+        </p:spPr>
+        <p:txBody>
+          <a:bodyPr wrap="square" rtlCol="0">
+            <a:spAutoFit/>
+          </a:bodyPr>
+          <a:lstStyle/>
+          <a:p>
+            <a:r>
+              <a:rPr lang="en-US" altLang="ko-KR" dirty="0" smtClean="0">
+                <a:solidFill>
+                  <a:srgbClr val="FF0000"/>
+                </a:solidFill>
+              </a:rPr>
+              <a:t>Timezone utc+9 </a:t>
+            </a:r>
+            <a:r>
+              <a:rPr lang="ko-KR" altLang="en-US" dirty="0" smtClean="0">
+                <a:solidFill>
+                  <a:srgbClr val="FF0000"/>
+                </a:solidFill>
+              </a:rPr>
+              <a:t>로 변경 작업해야 함</a:t>
+            </a:r>
+            <a:endParaRPr lang="ko-KR" altLang="en-US" dirty="0">
+              <a:solidFill>
+                <a:srgbClr val="FF0000"/>
+              </a:solidFill>
+            </a:endParaRPr>
+          </a:p>
+        </p:txBody>
+      </p:sp>
     </p:spTree>
     <p:extLst>
       <p:ext uri="{BB962C8B-B14F-4D97-AF65-F5344CB8AC3E}">
